--- a/figures/summary/main.pptx
+++ b/figures/summary/main.pptx
@@ -809,7 +809,7 @@
           <a:p>
             <a:fld id="{C764DE79-268F-4C1A-8933-263129D2AF90}" type="datetimeFigureOut">
               <a:rPr lang="en-US" smtClean="0"/>
-              <a:t>10/3/2024</a:t>
+              <a:t>2/28/25</a:t>
             </a:fld>
             <a:endParaRPr lang="en-US" dirty="0"/>
           </a:p>
@@ -975,7 +975,7 @@
           <a:p>
             <a:fld id="{C764DE79-268F-4C1A-8933-263129D2AF90}" type="datetimeFigureOut">
               <a:rPr lang="en-US" smtClean="0"/>
-              <a:t>10/3/2024</a:t>
+              <a:t>2/28/25</a:t>
             </a:fld>
             <a:endParaRPr lang="en-US" dirty="0"/>
           </a:p>
@@ -1151,7 +1151,7 @@
           <a:p>
             <a:fld id="{C764DE79-268F-4C1A-8933-263129D2AF90}" type="datetimeFigureOut">
               <a:rPr lang="en-US" smtClean="0"/>
-              <a:t>10/3/2024</a:t>
+              <a:t>2/28/25</a:t>
             </a:fld>
             <a:endParaRPr lang="en-US" dirty="0"/>
           </a:p>
@@ -1317,7 +1317,7 @@
           <a:p>
             <a:fld id="{C764DE79-268F-4C1A-8933-263129D2AF90}" type="datetimeFigureOut">
               <a:rPr lang="en-US" smtClean="0"/>
-              <a:t>10/3/2024</a:t>
+              <a:t>2/28/25</a:t>
             </a:fld>
             <a:endParaRPr lang="en-US" dirty="0"/>
           </a:p>
@@ -1559,7 +1559,7 @@
           <a:p>
             <a:fld id="{C764DE79-268F-4C1A-8933-263129D2AF90}" type="datetimeFigureOut">
               <a:rPr lang="en-US" smtClean="0"/>
-              <a:t>10/3/2024</a:t>
+              <a:t>2/28/25</a:t>
             </a:fld>
             <a:endParaRPr lang="en-US" dirty="0"/>
           </a:p>
@@ -1787,7 +1787,7 @@
           <a:p>
             <a:fld id="{C764DE79-268F-4C1A-8933-263129D2AF90}" type="datetimeFigureOut">
               <a:rPr lang="en-US" smtClean="0"/>
-              <a:t>10/3/2024</a:t>
+              <a:t>2/28/25</a:t>
             </a:fld>
             <a:endParaRPr lang="en-US" dirty="0"/>
           </a:p>
@@ -2150,7 +2150,7 @@
           <a:p>
             <a:fld id="{C764DE79-268F-4C1A-8933-263129D2AF90}" type="datetimeFigureOut">
               <a:rPr lang="en-US" smtClean="0"/>
-              <a:t>10/3/2024</a:t>
+              <a:t>2/28/25</a:t>
             </a:fld>
             <a:endParaRPr lang="en-US" dirty="0"/>
           </a:p>
@@ -2264,7 +2264,7 @@
           <a:p>
             <a:fld id="{C764DE79-268F-4C1A-8933-263129D2AF90}" type="datetimeFigureOut">
               <a:rPr lang="en-US" smtClean="0"/>
-              <a:t>10/3/2024</a:t>
+              <a:t>2/28/25</a:t>
             </a:fld>
             <a:endParaRPr lang="en-US" dirty="0"/>
           </a:p>
@@ -2355,7 +2355,7 @@
           <a:p>
             <a:fld id="{C764DE79-268F-4C1A-8933-263129D2AF90}" type="datetimeFigureOut">
               <a:rPr lang="en-US" smtClean="0"/>
-              <a:t>10/3/2024</a:t>
+              <a:t>2/28/25</a:t>
             </a:fld>
             <a:endParaRPr lang="en-US" dirty="0"/>
           </a:p>
@@ -2627,7 +2627,7 @@
           <a:p>
             <a:fld id="{C764DE79-268F-4C1A-8933-263129D2AF90}" type="datetimeFigureOut">
               <a:rPr lang="en-US" smtClean="0"/>
-              <a:t>10/3/2024</a:t>
+              <a:t>2/28/25</a:t>
             </a:fld>
             <a:endParaRPr lang="en-US" dirty="0"/>
           </a:p>
@@ -2880,7 +2880,7 @@
           <a:p>
             <a:fld id="{C764DE79-268F-4C1A-8933-263129D2AF90}" type="datetimeFigureOut">
               <a:rPr lang="en-US" smtClean="0"/>
-              <a:t>10/3/2024</a:t>
+              <a:t>2/28/25</a:t>
             </a:fld>
             <a:endParaRPr lang="en-US" dirty="0"/>
           </a:p>
@@ -3089,7 +3089,7 @@
           <a:p>
             <a:fld id="{C764DE79-268F-4C1A-8933-263129D2AF90}" type="datetimeFigureOut">
               <a:rPr lang="en-US" smtClean="0"/>
-              <a:t>10/3/2024</a:t>
+              <a:t>2/28/25</a:t>
             </a:fld>
             <a:endParaRPr lang="en-US" dirty="0"/>
           </a:p>
@@ -3498,8 +3498,8 @@
         </p:nvSpPr>
         <p:spPr>
           <a:xfrm>
-            <a:off x="3333493" y="454803"/>
-            <a:ext cx="2011680" cy="2240280"/>
+            <a:off x="3333493" y="454804"/>
+            <a:ext cx="2011680" cy="1667546"/>
           </a:xfrm>
           <a:prstGeom prst="roundRect">
             <a:avLst>
@@ -3547,7 +3547,7 @@
         </p:nvCxnSpPr>
         <p:spPr>
           <a:xfrm>
-            <a:off x="3208406" y="2190327"/>
+            <a:off x="3208406" y="1730750"/>
             <a:ext cx="285100" cy="2537"/>
           </a:xfrm>
           <a:prstGeom prst="straightConnector1">
@@ -3575,7 +3575,7 @@
         </p:nvCxnSpPr>
         <p:spPr>
           <a:xfrm>
-            <a:off x="3234472" y="916368"/>
+            <a:off x="3234472" y="748410"/>
             <a:ext cx="876261" cy="0"/>
           </a:xfrm>
           <a:prstGeom prst="straightConnector1">
@@ -3601,7 +3601,7 @@
         </p:nvSpPr>
         <p:spPr>
           <a:xfrm>
-            <a:off x="4110733" y="1964264"/>
+            <a:off x="4110733" y="1504687"/>
             <a:ext cx="457200" cy="457200"/>
           </a:xfrm>
           <a:prstGeom prst="roundRect">
@@ -3648,7 +3648,7 @@
         </p:nvSpPr>
         <p:spPr>
           <a:xfrm>
-            <a:off x="3493506" y="1964264"/>
+            <a:off x="3493506" y="1504687"/>
             <a:ext cx="457200" cy="457200"/>
           </a:xfrm>
           <a:prstGeom prst="roundRect">
@@ -3695,7 +3695,7 @@
         </p:nvSpPr>
         <p:spPr>
           <a:xfrm>
-            <a:off x="4110733" y="687768"/>
+            <a:off x="4110733" y="519810"/>
             <a:ext cx="457200" cy="457200"/>
           </a:xfrm>
           <a:prstGeom prst="roundRect">
@@ -3742,7 +3742,7 @@
         </p:nvSpPr>
         <p:spPr>
           <a:xfrm>
-            <a:off x="4727953" y="1140981"/>
+            <a:off x="4727953" y="849450"/>
             <a:ext cx="457200" cy="457200"/>
           </a:xfrm>
           <a:prstGeom prst="roundRect">
@@ -3789,7 +3789,7 @@
         </p:nvSpPr>
         <p:spPr>
           <a:xfrm>
-            <a:off x="4727953" y="1964264"/>
+            <a:off x="4727953" y="1504687"/>
             <a:ext cx="457200" cy="457200"/>
           </a:xfrm>
           <a:prstGeom prst="roundRect">
@@ -3839,7 +3839,7 @@
         </p:nvCxnSpPr>
         <p:spPr>
           <a:xfrm>
-            <a:off x="3950706" y="2192864"/>
+            <a:off x="3950706" y="1733287"/>
             <a:ext cx="160027" cy="0"/>
           </a:xfrm>
           <a:prstGeom prst="straightConnector1">
@@ -3868,7 +3868,7 @@
         </p:nvCxnSpPr>
         <p:spPr>
           <a:xfrm>
-            <a:off x="4567933" y="2192864"/>
+            <a:off x="4567933" y="1733287"/>
             <a:ext cx="160020" cy="0"/>
           </a:xfrm>
           <a:prstGeom prst="straightConnector1">
@@ -3897,8 +3897,8 @@
         </p:nvCxnSpPr>
         <p:spPr>
           <a:xfrm rot="16200000" flipH="1">
-            <a:off x="4421337" y="1062964"/>
-            <a:ext cx="224613" cy="388620"/>
+            <a:off x="4483123" y="833220"/>
+            <a:ext cx="101040" cy="388620"/>
           </a:xfrm>
           <a:prstGeom prst="bentConnector2">
             <a:avLst/>
@@ -3923,7 +3923,7 @@
         </p:nvSpPr>
         <p:spPr>
           <a:xfrm>
-            <a:off x="3337560" y="2743200"/>
+            <a:off x="3337560" y="2250745"/>
             <a:ext cx="822960" cy="457200"/>
           </a:xfrm>
           <a:prstGeom prst="roundRect">
@@ -3973,7 +3973,7 @@
         </p:nvSpPr>
         <p:spPr>
           <a:xfrm>
-            <a:off x="4201228" y="2743200"/>
+            <a:off x="4201228" y="2250745"/>
             <a:ext cx="1143000" cy="457200"/>
           </a:xfrm>
           <a:prstGeom prst="roundRect">
@@ -4215,7 +4215,7 @@
         </p:nvCxnSpPr>
         <p:spPr>
           <a:xfrm>
-            <a:off x="4567933" y="916368"/>
+            <a:off x="4567933" y="748410"/>
             <a:ext cx="826951" cy="0"/>
           </a:xfrm>
           <a:prstGeom prst="straightConnector1">
@@ -4243,7 +4243,7 @@
         </p:nvCxnSpPr>
         <p:spPr>
           <a:xfrm>
-            <a:off x="5185153" y="1369581"/>
+            <a:off x="5185153" y="1078050"/>
             <a:ext cx="209731" cy="0"/>
           </a:xfrm>
           <a:prstGeom prst="straightConnector1">
@@ -4271,7 +4271,7 @@
         </p:nvCxnSpPr>
         <p:spPr>
           <a:xfrm>
-            <a:off x="5185153" y="2192864"/>
+            <a:off x="5185153" y="1733287"/>
             <a:ext cx="206615" cy="0"/>
           </a:xfrm>
           <a:prstGeom prst="straightConnector1">
@@ -4293,15 +4293,15 @@
         <p:nvCxnSpPr>
           <p:cNvPr id="58" name="Google Shape;73;p13"/>
           <p:cNvCxnSpPr>
+            <a:cxnSpLocks/>
             <a:stCxn id="36" idx="0"/>
-            <a:endCxn id="63" idx="1"/>
           </p:cNvCxnSpPr>
           <p:nvPr/>
         </p:nvCxnSpPr>
         <p:spPr>
           <a:xfrm rot="5400000" flipH="1" flipV="1">
-            <a:off x="4755430" y="1324811"/>
-            <a:ext cx="223357" cy="1055551"/>
+            <a:off x="4804461" y="917381"/>
+            <a:ext cx="122178" cy="1052435"/>
           </a:xfrm>
           <a:prstGeom prst="bentConnector2">
             <a:avLst/>
@@ -4320,14 +4320,14 @@
       </p:cxnSp>
       <p:sp>
         <p:nvSpPr>
-          <p:cNvPr id="59" name="Google Shape;74;p13"/>
+          <p:cNvPr id="60" name="Google Shape;75;p13"/>
           <p:cNvSpPr/>
           <p:nvPr/>
         </p:nvSpPr>
         <p:spPr>
           <a:xfrm>
-            <a:off x="0" y="274320"/>
-            <a:ext cx="1783080" cy="731400"/>
+            <a:off x="0" y="1504687"/>
+            <a:ext cx="1783080" cy="1210922"/>
           </a:xfrm>
           <a:prstGeom prst="roundRect">
             <a:avLst>
@@ -4342,17 +4342,16 @@
           </a:ln>
         </p:spPr>
         <p:txBody>
-          <a:bodyPr spcFirstLastPara="1" wrap="square" lIns="91426" tIns="45700" rIns="91426" bIns="45700" anchor="ctr" anchorCtr="0">
+          <a:bodyPr spcFirstLastPara="1" wrap="square" lIns="91426" tIns="45700" rIns="0" bIns="45700" anchor="ctr" anchorCtr="0">
             <a:noAutofit/>
           </a:bodyPr>
           <a:lstStyle/>
           <a:p>
-            <a:pPr defTabSz="914400">
+            <a:pPr algn="ctr" defTabSz="914400">
               <a:buClr>
                 <a:srgbClr val="000000"/>
               </a:buClr>
-              <a:buFont typeface="Arial" panose="020B0604020202020204"/>
-              <a:buNone/>
+              <a:buSzPts val="1800"/>
             </a:pPr>
             <a:r>
               <a:rPr lang="en-GB" sz="1400" b="1" kern="0" dirty="0">
@@ -4363,7 +4362,7 @@
                 <a:cs typeface="Arial" panose="020B0604020202020204" pitchFamily="34" charset="0"/>
                 <a:sym typeface="Arial" panose="020B0604020202020204"/>
               </a:rPr>
-              <a:t>Cross-species</a:t>
+              <a:t>Cross-modalities</a:t>
             </a:r>
             <a:endParaRPr sz="1400" b="1" kern="0" dirty="0">
               <a:solidFill>
@@ -4375,13 +4374,11 @@
             </a:endParaRPr>
           </a:p>
           <a:p>
-            <a:pPr marL="285750" indent="-260350" defTabSz="914400">
+            <a:pPr marL="25400" algn="ctr" defTabSz="914400">
               <a:buClr>
                 <a:srgbClr val="000000"/>
               </a:buClr>
               <a:buSzPts val="1400"/>
-              <a:buFont typeface="Arial" panose="020B0604020202020204"/>
-              <a:buChar char="•"/>
             </a:pPr>
             <a:r>
               <a:rPr lang="en-GB" sz="1400" kern="0" dirty="0">
@@ -4392,7 +4389,7 @@
                 <a:cs typeface="Arial" panose="020B0604020202020204" pitchFamily="34" charset="0"/>
                 <a:sym typeface="Arial" panose="020B0604020202020204"/>
               </a:rPr>
-              <a:t>Human</a:t>
+              <a:t>T1w MRI</a:t>
             </a:r>
             <a:endParaRPr sz="1400" kern="0" dirty="0">
               <a:solidFill>
@@ -4404,13 +4401,11 @@
             </a:endParaRPr>
           </a:p>
           <a:p>
-            <a:pPr marL="285750" indent="-260350" defTabSz="914400">
+            <a:pPr marL="25400" algn="ctr" defTabSz="914400">
               <a:buClr>
                 <a:srgbClr val="000000"/>
               </a:buClr>
               <a:buSzPts val="1400"/>
-              <a:buFont typeface="Arial" panose="020B0604020202020204"/>
-              <a:buChar char="•"/>
             </a:pPr>
             <a:r>
               <a:rPr lang="en-GB" sz="1400" kern="0" dirty="0">
@@ -4421,7 +4416,18 @@
                 <a:cs typeface="Arial" panose="020B0604020202020204" pitchFamily="34" charset="0"/>
                 <a:sym typeface="Arial" panose="020B0604020202020204"/>
               </a:rPr>
-              <a:t>Mouse</a:t>
+              <a:t>T2w</a:t>
+            </a:r>
+            <a:r>
+              <a:rPr lang="en-US" altLang="en-GB" sz="1400" kern="0" dirty="0">
+                <a:solidFill>
+                  <a:srgbClr val="000000"/>
+                </a:solidFill>
+                <a:latin typeface="Arial" panose="020B0604020202020204" pitchFamily="34" charset="0"/>
+                <a:cs typeface="Arial" panose="020B0604020202020204" pitchFamily="34" charset="0"/>
+                <a:sym typeface="Arial" panose="020B0604020202020204"/>
+              </a:rPr>
+              <a:t> MRI</a:t>
             </a:r>
             <a:endParaRPr sz="1400" kern="0" dirty="0">
               <a:solidFill>
@@ -4432,18 +4438,37 @@
               <a:sym typeface="Arial" panose="020B0604020202020204"/>
             </a:endParaRPr>
           </a:p>
-        </p:txBody>
-      </p:sp>
-      <p:sp>
-        <p:nvSpPr>
-          <p:cNvPr id="60" name="Google Shape;75;p13"/>
+          <a:p>
+            <a:pPr marL="25400" algn="ctr" defTabSz="914400">
+              <a:buClr>
+                <a:srgbClr val="000000"/>
+              </a:buClr>
+              <a:buSzPts val="1400"/>
+            </a:pPr>
+            <a:r>
+              <a:rPr lang="en-GB" sz="1400" kern="0" dirty="0">
+                <a:solidFill>
+                  <a:srgbClr val="000000"/>
+                </a:solidFill>
+                <a:latin typeface="Arial" panose="020B0604020202020204" pitchFamily="34" charset="0"/>
+                <a:cs typeface="Arial" panose="020B0604020202020204" pitchFamily="34" charset="0"/>
+                <a:sym typeface="Arial" panose="020B0604020202020204"/>
+              </a:rPr>
+              <a:t>PRESS MRS</a:t>
+            </a:r>
+          </a:p>
+        </p:txBody>
+      </p:sp>
+      <p:sp>
+        <p:nvSpPr>
+          <p:cNvPr id="61" name="Google Shape;76;p13"/>
           <p:cNvSpPr/>
           <p:nvPr/>
         </p:nvSpPr>
         <p:spPr>
           <a:xfrm>
-            <a:off x="0" y="1051560"/>
-            <a:ext cx="1783080" cy="1143000"/>
+            <a:off x="0" y="274201"/>
+            <a:ext cx="1783080" cy="1032449"/>
           </a:xfrm>
           <a:prstGeom prst="roundRect">
             <a:avLst>
@@ -4458,207 +4483,16 @@
           </a:ln>
         </p:spPr>
         <p:txBody>
-          <a:bodyPr spcFirstLastPara="1" wrap="square" lIns="91426" tIns="45700" rIns="0" bIns="45700" anchor="ctr" anchorCtr="0">
+          <a:bodyPr spcFirstLastPara="1" wrap="square" lIns="91426" tIns="45700" rIns="91426" bIns="45700" anchor="ctr" anchorCtr="0">
             <a:noAutofit/>
           </a:bodyPr>
           <a:lstStyle/>
           <a:p>
-            <a:pPr defTabSz="914400">
+            <a:pPr algn="ctr" defTabSz="914400">
               <a:buClr>
                 <a:srgbClr val="000000"/>
               </a:buClr>
               <a:buSzPts val="1800"/>
-              <a:buFont typeface="Arial" panose="020B0604020202020204"/>
-              <a:buNone/>
-            </a:pPr>
-            <a:r>
-              <a:rPr lang="en-GB" sz="1400" b="1" kern="0" dirty="0">
-                <a:solidFill>
-                  <a:srgbClr val="000000"/>
-                </a:solidFill>
-                <a:latin typeface="Arial" panose="020B0604020202020204" pitchFamily="34" charset="0"/>
-                <a:cs typeface="Arial" panose="020B0604020202020204" pitchFamily="34" charset="0"/>
-                <a:sym typeface="Arial" panose="020B0604020202020204"/>
-              </a:rPr>
-              <a:t>Cross-modalities</a:t>
-            </a:r>
-            <a:endParaRPr sz="1400" b="1" kern="0" dirty="0">
-              <a:solidFill>
-                <a:srgbClr val="000000"/>
-              </a:solidFill>
-              <a:latin typeface="Arial" panose="020B0604020202020204" pitchFamily="34" charset="0"/>
-              <a:cs typeface="Arial" panose="020B0604020202020204" pitchFamily="34" charset="0"/>
-              <a:sym typeface="Arial" panose="020B0604020202020204"/>
-            </a:endParaRPr>
-          </a:p>
-          <a:p>
-            <a:pPr marL="285750" indent="-260350" defTabSz="914400">
-              <a:buClr>
-                <a:srgbClr val="000000"/>
-              </a:buClr>
-              <a:buSzPts val="1400"/>
-              <a:buFont typeface="Arial" panose="020B0604020202020204"/>
-              <a:buChar char="•"/>
-            </a:pPr>
-            <a:r>
-              <a:rPr lang="en-GB" sz="1400" kern="0" dirty="0">
-                <a:solidFill>
-                  <a:srgbClr val="000000"/>
-                </a:solidFill>
-                <a:latin typeface="Arial" panose="020B0604020202020204" pitchFamily="34" charset="0"/>
-                <a:cs typeface="Arial" panose="020B0604020202020204" pitchFamily="34" charset="0"/>
-                <a:sym typeface="Arial" panose="020B0604020202020204"/>
-              </a:rPr>
-              <a:t>T1w MRI</a:t>
-            </a:r>
-            <a:endParaRPr sz="1400" kern="0" dirty="0">
-              <a:solidFill>
-                <a:srgbClr val="000000"/>
-              </a:solidFill>
-              <a:latin typeface="Arial" panose="020B0604020202020204" pitchFamily="34" charset="0"/>
-              <a:cs typeface="Arial" panose="020B0604020202020204" pitchFamily="34" charset="0"/>
-              <a:sym typeface="Arial" panose="020B0604020202020204"/>
-            </a:endParaRPr>
-          </a:p>
-          <a:p>
-            <a:pPr marL="285750" indent="-260350" defTabSz="914400">
-              <a:buClr>
-                <a:srgbClr val="000000"/>
-              </a:buClr>
-              <a:buSzPts val="1400"/>
-              <a:buFont typeface="Arial" panose="020B0604020202020204"/>
-              <a:buChar char="•"/>
-            </a:pPr>
-            <a:r>
-              <a:rPr lang="en-GB" sz="1400" kern="0" dirty="0">
-                <a:solidFill>
-                  <a:srgbClr val="000000"/>
-                </a:solidFill>
-                <a:latin typeface="Arial" panose="020B0604020202020204" pitchFamily="34" charset="0"/>
-                <a:cs typeface="Arial" panose="020B0604020202020204" pitchFamily="34" charset="0"/>
-                <a:sym typeface="Arial" panose="020B0604020202020204"/>
-              </a:rPr>
-              <a:t>T2w</a:t>
-            </a:r>
-            <a:r>
-              <a:rPr lang="en-US" altLang="en-GB" sz="1400" kern="0" dirty="0">
-                <a:solidFill>
-                  <a:srgbClr val="000000"/>
-                </a:solidFill>
-                <a:latin typeface="Arial" panose="020B0604020202020204" pitchFamily="34" charset="0"/>
-                <a:cs typeface="Arial" panose="020B0604020202020204" pitchFamily="34" charset="0"/>
-                <a:sym typeface="Arial" panose="020B0604020202020204"/>
-              </a:rPr>
-              <a:t> MRI</a:t>
-            </a:r>
-            <a:endParaRPr sz="1400" kern="0" dirty="0">
-              <a:solidFill>
-                <a:srgbClr val="000000"/>
-              </a:solidFill>
-              <a:latin typeface="Arial" panose="020B0604020202020204" pitchFamily="34" charset="0"/>
-              <a:cs typeface="Arial" panose="020B0604020202020204" pitchFamily="34" charset="0"/>
-              <a:sym typeface="Arial" panose="020B0604020202020204"/>
-            </a:endParaRPr>
-          </a:p>
-          <a:p>
-            <a:pPr marL="285750" indent="-260350" defTabSz="914400">
-              <a:buClr>
-                <a:srgbClr val="000000"/>
-              </a:buClr>
-              <a:buSzPts val="1400"/>
-              <a:buFont typeface="Arial" panose="020B0604020202020204"/>
-              <a:buChar char="•"/>
-            </a:pPr>
-            <a:r>
-              <a:rPr lang="en-US" altLang="en-GB" sz="1400" kern="0" dirty="0">
-                <a:solidFill>
-                  <a:srgbClr val="000000"/>
-                </a:solidFill>
-                <a:latin typeface="Arial" panose="020B0604020202020204" pitchFamily="34" charset="0"/>
-                <a:cs typeface="Arial" panose="020B0604020202020204" pitchFamily="34" charset="0"/>
-                <a:sym typeface="Arial" panose="020B0604020202020204"/>
-              </a:rPr>
-              <a:t>FLAIR</a:t>
-            </a:r>
-            <a:r>
-              <a:rPr lang="en-GB" sz="1400" kern="0" dirty="0">
-                <a:solidFill>
-                  <a:srgbClr val="000000"/>
-                </a:solidFill>
-                <a:latin typeface="Arial" panose="020B0604020202020204" pitchFamily="34" charset="0"/>
-                <a:cs typeface="Arial" panose="020B0604020202020204" pitchFamily="34" charset="0"/>
-                <a:sym typeface="Arial" panose="020B0604020202020204"/>
-              </a:rPr>
-              <a:t> MRI</a:t>
-            </a:r>
-            <a:endParaRPr sz="1400" kern="0" dirty="0">
-              <a:solidFill>
-                <a:srgbClr val="000000"/>
-              </a:solidFill>
-              <a:latin typeface="Arial" panose="020B0604020202020204" pitchFamily="34" charset="0"/>
-              <a:cs typeface="Arial" panose="020B0604020202020204" pitchFamily="34" charset="0"/>
-              <a:sym typeface="Arial" panose="020B0604020202020204"/>
-            </a:endParaRPr>
-          </a:p>
-          <a:p>
-            <a:pPr marL="285750" indent="-260350" defTabSz="914400">
-              <a:buClr>
-                <a:srgbClr val="000000"/>
-              </a:buClr>
-              <a:buSzPts val="1400"/>
-              <a:buFont typeface="Arial" panose="020B0604020202020204"/>
-              <a:buChar char="•"/>
-            </a:pPr>
-            <a:r>
-              <a:rPr lang="en-GB" sz="1400" kern="0" dirty="0">
-                <a:solidFill>
-                  <a:srgbClr val="000000"/>
-                </a:solidFill>
-                <a:latin typeface="Arial" panose="020B0604020202020204" pitchFamily="34" charset="0"/>
-                <a:cs typeface="Arial" panose="020B0604020202020204" pitchFamily="34" charset="0"/>
-                <a:sym typeface="Arial" panose="020B0604020202020204"/>
-              </a:rPr>
-              <a:t>PRESS MRS</a:t>
-            </a:r>
-          </a:p>
-        </p:txBody>
-      </p:sp>
-      <p:sp>
-        <p:nvSpPr>
-          <p:cNvPr id="61" name="Google Shape;76;p13"/>
-          <p:cNvSpPr/>
-          <p:nvPr/>
-        </p:nvSpPr>
-        <p:spPr>
-          <a:xfrm>
-            <a:off x="0" y="2240280"/>
-            <a:ext cx="1783080" cy="960000"/>
-          </a:xfrm>
-          <a:prstGeom prst="roundRect">
-            <a:avLst>
-              <a:gd name="adj" fmla="val 16667"/>
-            </a:avLst>
-          </a:prstGeom>
-          <a:solidFill>
-            <a:srgbClr val="E1EFD8"/>
-          </a:solidFill>
-          <a:ln>
-            <a:noFill/>
-          </a:ln>
-        </p:spPr>
-        <p:txBody>
-          <a:bodyPr spcFirstLastPara="1" wrap="square" lIns="91426" tIns="45700" rIns="91426" bIns="45700" anchor="ctr" anchorCtr="0">
-            <a:noAutofit/>
-          </a:bodyPr>
-          <a:lstStyle/>
-          <a:p>
-            <a:pPr defTabSz="914400">
-              <a:buClr>
-                <a:srgbClr val="000000"/>
-              </a:buClr>
-              <a:buSzPts val="1800"/>
-              <a:buFont typeface="Arial" panose="020B0604020202020204"/>
-              <a:buNone/>
             </a:pPr>
             <a:r>
               <a:rPr lang="en-GB" sz="1400" b="1" kern="0" dirty="0">
@@ -4681,13 +4515,11 @@
             </a:endParaRPr>
           </a:p>
           <a:p>
-            <a:pPr marL="285750" indent="-260350" defTabSz="914400">
+            <a:pPr marL="25400" algn="ctr" defTabSz="914400">
               <a:buClr>
                 <a:srgbClr val="000000"/>
               </a:buClr>
               <a:buSzPts val="1400"/>
-              <a:buFont typeface="Arial" panose="020B0604020202020204"/>
-              <a:buChar char="•"/>
             </a:pPr>
             <a:r>
               <a:rPr lang="en-GB" sz="1400" kern="0" dirty="0">
@@ -4698,17 +4530,15 @@
                 <a:cs typeface="Arial" panose="020B0604020202020204" pitchFamily="34" charset="0"/>
                 <a:sym typeface="Arial" panose="020B0604020202020204"/>
               </a:rPr>
-              <a:t>Low: 0.3 T</a:t>
-            </a:r>
-          </a:p>
-          <a:p>
-            <a:pPr marL="285750" indent="-260350" defTabSz="914400">
+              <a:t>1.5T</a:t>
+            </a:r>
+          </a:p>
+          <a:p>
+            <a:pPr marL="25400" algn="ctr" defTabSz="914400">
               <a:buClr>
                 <a:srgbClr val="000000"/>
               </a:buClr>
               <a:buSzPts val="1400"/>
-              <a:buFont typeface="Arial" panose="020B0604020202020204"/>
-              <a:buChar char="•"/>
             </a:pPr>
             <a:r>
               <a:rPr lang="en-GB" sz="1400" kern="0" dirty="0">
@@ -4719,36 +4549,7 @@
                 <a:cs typeface="Arial" panose="020B0604020202020204" pitchFamily="34" charset="0"/>
                 <a:sym typeface="Arial" panose="020B0604020202020204"/>
               </a:rPr>
-              <a:t>Normal:1.5/3 T</a:t>
-            </a:r>
-            <a:endParaRPr sz="1400" kern="0" dirty="0">
-              <a:solidFill>
-                <a:srgbClr val="000000"/>
-              </a:solidFill>
-              <a:latin typeface="Arial" panose="020B0604020202020204" pitchFamily="34" charset="0"/>
-              <a:cs typeface="Arial" panose="020B0604020202020204" pitchFamily="34" charset="0"/>
-              <a:sym typeface="Arial" panose="020B0604020202020204"/>
-            </a:endParaRPr>
-          </a:p>
-          <a:p>
-            <a:pPr marL="285750" indent="-260350" defTabSz="914400">
-              <a:buClr>
-                <a:srgbClr val="000000"/>
-              </a:buClr>
-              <a:buSzPts val="1400"/>
-              <a:buFont typeface="Arial" panose="020B0604020202020204"/>
-              <a:buChar char="•"/>
-            </a:pPr>
-            <a:r>
-              <a:rPr lang="en-GB" sz="1400" kern="0" dirty="0">
-                <a:solidFill>
-                  <a:srgbClr val="000000"/>
-                </a:solidFill>
-                <a:latin typeface="Arial" panose="020B0604020202020204" pitchFamily="34" charset="0"/>
-                <a:cs typeface="Arial" panose="020B0604020202020204" pitchFamily="34" charset="0"/>
-                <a:sym typeface="Arial" panose="020B0604020202020204"/>
-              </a:rPr>
-              <a:t>High: 9.4 T</a:t>
+              <a:t>3T</a:t>
             </a:r>
             <a:endParaRPr sz="1400" kern="0" dirty="0">
               <a:solidFill>
@@ -4827,7 +4628,7 @@
         <p:spPr>
           <a:xfrm>
             <a:off x="5394884" y="277807"/>
-            <a:ext cx="1463040" cy="2926200"/>
+            <a:ext cx="1463040" cy="2436907"/>
           </a:xfrm>
           <a:prstGeom prst="roundRect">
             <a:avLst>
@@ -4873,7 +4674,7 @@
         </p:nvSpPr>
         <p:spPr>
           <a:xfrm>
-            <a:off x="5394884" y="323527"/>
+            <a:off x="5394884" y="247881"/>
             <a:ext cx="1463040" cy="274200"/>
           </a:xfrm>
           <a:prstGeom prst="rect">
@@ -4926,7 +4727,7 @@
         </p:blipFill>
         <p:spPr>
           <a:xfrm rot="10800000" flipH="1">
-            <a:off x="5513756" y="597847"/>
+            <a:off x="5513756" y="502737"/>
             <a:ext cx="1225550" cy="1225550"/>
           </a:xfrm>
           <a:prstGeom prst="rect">
@@ -4946,7 +4747,7 @@
         </p:nvSpPr>
         <p:spPr>
           <a:xfrm>
-            <a:off x="5394884" y="1878006"/>
+            <a:off x="5394884" y="1689643"/>
             <a:ext cx="1463040" cy="274200"/>
           </a:xfrm>
           <a:prstGeom prst="rect">
@@ -5001,7 +4802,7 @@
         <p:spPr>
           <a:xfrm>
             <a:off x="1823858" y="274326"/>
-            <a:ext cx="1463040" cy="2926200"/>
+            <a:ext cx="1463040" cy="2440392"/>
           </a:xfrm>
           <a:prstGeom prst="roundRect">
             <a:avLst>
@@ -5047,7 +4848,7 @@
         </p:nvSpPr>
         <p:spPr>
           <a:xfrm>
-            <a:off x="1823848" y="321531"/>
+            <a:off x="1823848" y="247881"/>
             <a:ext cx="1463040" cy="274200"/>
           </a:xfrm>
           <a:prstGeom prst="rect">
@@ -5108,7 +4909,7 @@
         </p:blipFill>
         <p:spPr>
           <a:xfrm>
-            <a:off x="1942730" y="594246"/>
+            <a:off x="1942730" y="503689"/>
             <a:ext cx="1225296" cy="1223645"/>
           </a:xfrm>
           <a:prstGeom prst="rect">
@@ -5128,7 +4929,7 @@
         </p:nvSpPr>
         <p:spPr>
           <a:xfrm>
-            <a:off x="1823848" y="1874521"/>
+            <a:off x="1823848" y="1689643"/>
             <a:ext cx="1463040" cy="274200"/>
           </a:xfrm>
           <a:prstGeom prst="rect">
@@ -5182,7 +4983,7 @@
         </p:nvGrpSpPr>
         <p:grpSpPr>
           <a:xfrm>
-            <a:off x="1899790" y="2169575"/>
+            <a:off x="1899790" y="1935819"/>
             <a:ext cx="1311176" cy="779350"/>
             <a:chOff x="2227874" y="3545135"/>
             <a:chExt cx="1324688" cy="779350"/>
@@ -5229,9 +5030,7 @@
             <a:prstGeom prst="rect">
               <a:avLst/>
             </a:prstGeom>
-            <a:solidFill>
-              <a:srgbClr val="FFFFFF"/>
-            </a:solidFill>
+            <a:noFill/>
             <a:ln>
               <a:noFill/>
             </a:ln>
@@ -5287,81 +5086,100 @@
           </p:txBody>
         </p:sp>
       </p:grpSp>
-      <p:pic>
-        <p:nvPicPr>
-          <p:cNvPr id="74" name="Google Shape;90;p13"/>
-          <p:cNvPicPr preferRelativeResize="0"/>
+      <p:grpSp>
+        <p:nvGrpSpPr>
+          <p:cNvPr id="2" name="Group 1">
+            <a:extLst>
+              <a:ext uri="{FF2B5EF4-FFF2-40B4-BE49-F238E27FC236}">
+                <a16:creationId xmlns:a16="http://schemas.microsoft.com/office/drawing/2014/main" id="{29F2861B-7C90-0369-2EA4-ECAFA5684140}"/>
+              </a:ext>
+            </a:extLst>
+          </p:cNvPr>
+          <p:cNvGrpSpPr/>
           <p:nvPr/>
-        </p:nvPicPr>
-        <p:blipFill rotWithShape="1">
-          <a:blip r:embed="rId6"/>
-          <a:srcRect l="39764" t="68333" r="31914" b="9902"/>
-          <a:stretch>
-            <a:fillRect/>
-          </a:stretch>
-        </p:blipFill>
-        <p:spPr>
-          <a:xfrm flipH="1">
-            <a:off x="5468036" y="2206839"/>
-            <a:ext cx="1311150" cy="597025"/>
-          </a:xfrm>
-          <a:prstGeom prst="rect">
-            <a:avLst/>
-          </a:prstGeom>
-          <a:noFill/>
-          <a:ln>
+        </p:nvGrpSpPr>
+        <p:grpSpPr>
+          <a:xfrm>
+            <a:off x="5468036" y="1936270"/>
+            <a:ext cx="1311150" cy="778448"/>
+            <a:chOff x="5468036" y="2206839"/>
+            <a:chExt cx="1311150" cy="778448"/>
+          </a:xfrm>
+        </p:grpSpPr>
+        <p:pic>
+          <p:nvPicPr>
+            <p:cNvPr id="74" name="Google Shape;90;p13"/>
+            <p:cNvPicPr preferRelativeResize="0"/>
+            <p:nvPr/>
+          </p:nvPicPr>
+          <p:blipFill rotWithShape="1">
+            <a:blip r:embed="rId6"/>
+            <a:srcRect l="39764" t="68333" r="31914" b="9902"/>
+            <a:stretch>
+              <a:fillRect/>
+            </a:stretch>
+          </p:blipFill>
+          <p:spPr>
+            <a:xfrm flipH="1">
+              <a:off x="5468036" y="2206839"/>
+              <a:ext cx="1311150" cy="597025"/>
+            </a:xfrm>
+            <a:prstGeom prst="rect">
+              <a:avLst/>
+            </a:prstGeom>
             <a:noFill/>
-          </a:ln>
-        </p:spPr>
-      </p:pic>
-      <p:sp>
-        <p:nvSpPr>
-          <p:cNvPr id="75" name="Google Shape;91;p13"/>
-          <p:cNvSpPr/>
-          <p:nvPr/>
-        </p:nvSpPr>
-        <p:spPr>
-          <a:xfrm>
-            <a:off x="5468036" y="2797787"/>
-            <a:ext cx="1311114" cy="187500"/>
-          </a:xfrm>
-          <a:prstGeom prst="rect">
-            <a:avLst/>
-          </a:prstGeom>
-          <a:solidFill>
-            <a:srgbClr val="FFFFFF"/>
-          </a:solidFill>
-          <a:ln>
+            <a:ln>
+              <a:noFill/>
+            </a:ln>
+          </p:spPr>
+        </p:pic>
+        <p:sp>
+          <p:nvSpPr>
+            <p:cNvPr id="75" name="Google Shape;91;p13"/>
+            <p:cNvSpPr/>
+            <p:nvPr/>
+          </p:nvSpPr>
+          <p:spPr>
+            <a:xfrm>
+              <a:off x="5468036" y="2797787"/>
+              <a:ext cx="1311114" cy="187500"/>
+            </a:xfrm>
+            <a:prstGeom prst="rect">
+              <a:avLst/>
+            </a:prstGeom>
             <a:noFill/>
-          </a:ln>
-        </p:spPr>
-        <p:txBody>
-          <a:bodyPr spcFirstLastPara="1" wrap="square" lIns="91426" tIns="91426" rIns="91426" bIns="91426" anchor="ctr" anchorCtr="0">
-            <a:noAutofit/>
-          </a:bodyPr>
-          <a:lstStyle/>
-          <a:p>
-            <a:pPr algn="ctr" defTabSz="914400">
-              <a:buClr>
-                <a:srgbClr val="000000"/>
-              </a:buClr>
-              <a:buFont typeface="Arial" panose="020B0604020202020204"/>
-              <a:buNone/>
-            </a:pPr>
-            <a:r>
-              <a:rPr lang="en-GB" sz="1000" kern="0" dirty="0">
-                <a:solidFill>
+            <a:ln>
+              <a:noFill/>
+            </a:ln>
+          </p:spPr>
+          <p:txBody>
+            <a:bodyPr spcFirstLastPara="1" wrap="square" lIns="91426" tIns="91426" rIns="91426" bIns="91426" anchor="ctr" anchorCtr="0">
+              <a:noAutofit/>
+            </a:bodyPr>
+            <a:lstStyle/>
+            <a:p>
+              <a:pPr algn="ctr" defTabSz="914400">
+                <a:buClr>
                   <a:srgbClr val="000000"/>
-                </a:solidFill>
-                <a:latin typeface="Arial" panose="020B0604020202020204" pitchFamily="34" charset="0"/>
-                <a:cs typeface="Arial" panose="020B0604020202020204" pitchFamily="34" charset="0"/>
-                <a:sym typeface="Arial" panose="020B0604020202020204"/>
-              </a:rPr>
-              <a:t>Frequency (ppm)</a:t>
-            </a:r>
-          </a:p>
-        </p:txBody>
-      </p:sp>
+                </a:buClr>
+                <a:buFont typeface="Arial" panose="020B0604020202020204"/>
+                <a:buNone/>
+              </a:pPr>
+              <a:r>
+                <a:rPr lang="en-GB" sz="1000" kern="0" dirty="0">
+                  <a:solidFill>
+                    <a:srgbClr val="000000"/>
+                  </a:solidFill>
+                  <a:latin typeface="Arial" panose="020B0604020202020204" pitchFamily="34" charset="0"/>
+                  <a:cs typeface="Arial" panose="020B0604020202020204" pitchFamily="34" charset="0"/>
+                  <a:sym typeface="Arial" panose="020B0604020202020204"/>
+                </a:rPr>
+                <a:t>Frequency (ppm)</a:t>
+              </a:r>
+            </a:p>
+          </p:txBody>
+        </p:sp>
+      </p:grpSp>
     </p:spTree>
   </p:cSld>
   <p:clrMapOvr>

--- a/figures/summary/main.pptx
+++ b/figures/summary/main.pptx
@@ -4010,7 +4010,7 @@
                 <a:cs typeface="Arial" panose="020B0604020202020204" pitchFamily="34" charset="0"/>
                 <a:sym typeface="Arial" panose="020B0604020202020204"/>
               </a:rPr>
-              <a:t>RAUNet</a:t>
+              <a:t>CUNet</a:t>
             </a:r>
             <a:r>
               <a:rPr lang="en-GB" sz="1400" b="1" kern="0" dirty="0">
@@ -4975,211 +4975,175 @@
           </a:p>
         </p:txBody>
       </p:sp>
-      <p:grpSp>
-        <p:nvGrpSpPr>
-          <p:cNvPr id="71" name="Google Shape;86;p13"/>
-          <p:cNvGrpSpPr/>
+      <p:pic>
+        <p:nvPicPr>
+          <p:cNvPr id="72" name="Google Shape;87;p13"/>
+          <p:cNvPicPr preferRelativeResize="0"/>
           <p:nvPr/>
-        </p:nvGrpSpPr>
-        <p:grpSpPr>
+        </p:nvPicPr>
+        <p:blipFill rotWithShape="1">
+          <a:blip r:embed="rId5"/>
+          <a:srcRect l="9089" t="37061" r="62046" b="41445"/>
+          <a:stretch>
+            <a:fillRect/>
+          </a:stretch>
+        </p:blipFill>
+        <p:spPr>
           <a:xfrm>
             <a:off x="1899790" y="1935819"/>
-            <a:ext cx="1311176" cy="779350"/>
-            <a:chOff x="2227874" y="3545135"/>
-            <a:chExt cx="1324688" cy="779350"/>
-          </a:xfrm>
-        </p:grpSpPr>
-        <p:pic>
-          <p:nvPicPr>
-            <p:cNvPr id="72" name="Google Shape;87;p13"/>
-            <p:cNvPicPr preferRelativeResize="0"/>
-            <p:nvPr/>
-          </p:nvPicPr>
-          <p:blipFill rotWithShape="1">
-            <a:blip r:embed="rId5"/>
-            <a:srcRect l="9089" t="37061" r="62046" b="41445"/>
-            <a:stretch>
-              <a:fillRect/>
-            </a:stretch>
-          </p:blipFill>
-          <p:spPr>
-            <a:xfrm>
-              <a:off x="2227874" y="3545135"/>
-              <a:ext cx="1324688" cy="591850"/>
-            </a:xfrm>
-            <a:prstGeom prst="rect">
-              <a:avLst/>
-            </a:prstGeom>
+            <a:ext cx="1311176" cy="591850"/>
+          </a:xfrm>
+          <a:prstGeom prst="rect">
+            <a:avLst/>
+          </a:prstGeom>
+          <a:noFill/>
+          <a:ln>
             <a:noFill/>
-            <a:ln>
-              <a:noFill/>
-            </a:ln>
-          </p:spPr>
-        </p:pic>
-        <p:sp>
-          <p:nvSpPr>
-            <p:cNvPr id="73" name="Google Shape;88;p13"/>
-            <p:cNvSpPr/>
-            <p:nvPr/>
-          </p:nvSpPr>
-          <p:spPr>
-            <a:xfrm>
-              <a:off x="2227874" y="4136985"/>
-              <a:ext cx="1323600" cy="187500"/>
-            </a:xfrm>
-            <a:prstGeom prst="rect">
-              <a:avLst/>
-            </a:prstGeom>
+          </a:ln>
+        </p:spPr>
+      </p:pic>
+      <p:sp>
+        <p:nvSpPr>
+          <p:cNvPr id="73" name="Google Shape;88;p13"/>
+          <p:cNvSpPr/>
+          <p:nvPr/>
+        </p:nvSpPr>
+        <p:spPr>
+          <a:xfrm>
+            <a:off x="1899790" y="2527669"/>
+            <a:ext cx="1310099" cy="187500"/>
+          </a:xfrm>
+          <a:prstGeom prst="rect">
+            <a:avLst/>
+          </a:prstGeom>
+          <a:noFill/>
+          <a:ln>
             <a:noFill/>
-            <a:ln>
-              <a:noFill/>
-            </a:ln>
-          </p:spPr>
-          <p:txBody>
-            <a:bodyPr spcFirstLastPara="1" wrap="square" lIns="91426" tIns="91426" rIns="91426" bIns="91426" anchor="ctr" anchorCtr="0">
-              <a:noAutofit/>
-            </a:bodyPr>
-            <a:lstStyle/>
-            <a:p>
-              <a:pPr algn="ctr" defTabSz="914400">
-                <a:buClr>
+          </a:ln>
+        </p:spPr>
+        <p:txBody>
+          <a:bodyPr spcFirstLastPara="1" wrap="square" lIns="91426" tIns="91426" rIns="91426" bIns="91426" anchor="ctr" anchorCtr="0">
+            <a:noAutofit/>
+          </a:bodyPr>
+          <a:lstStyle/>
+          <a:p>
+            <a:pPr algn="ctr" defTabSz="914400">
+              <a:buClr>
+                <a:srgbClr val="000000"/>
+              </a:buClr>
+              <a:buSzPts val="1100"/>
+              <a:buFont typeface="Arial" panose="020B0604020202020204"/>
+              <a:buNone/>
+            </a:pPr>
+            <a:r>
+              <a:rPr lang="en-GB" sz="1000" kern="0" dirty="0">
+                <a:solidFill>
                   <a:srgbClr val="000000"/>
-                </a:buClr>
-                <a:buSzPts val="1100"/>
-                <a:buFont typeface="Arial" panose="020B0604020202020204"/>
-                <a:buNone/>
-              </a:pPr>
-              <a:r>
-                <a:rPr lang="en-GB" sz="1000" kern="0" dirty="0">
-                  <a:solidFill>
-                    <a:srgbClr val="000000"/>
-                  </a:solidFill>
-                  <a:latin typeface="Arial" panose="020B0604020202020204" pitchFamily="34" charset="0"/>
-                  <a:cs typeface="Arial" panose="020B0604020202020204" pitchFamily="34" charset="0"/>
-                  <a:sym typeface="Arial" panose="020B0604020202020204"/>
-                </a:rPr>
-                <a:t>Time (</a:t>
-              </a:r>
-              <a:r>
-                <a:rPr lang="en-GB" sz="1000" kern="0" dirty="0" err="1">
-                  <a:solidFill>
-                    <a:srgbClr val="000000"/>
-                  </a:solidFill>
-                  <a:latin typeface="Arial" panose="020B0604020202020204" pitchFamily="34" charset="0"/>
-                  <a:cs typeface="Arial" panose="020B0604020202020204" pitchFamily="34" charset="0"/>
-                  <a:sym typeface="Arial" panose="020B0604020202020204"/>
-                </a:rPr>
-                <a:t>ms</a:t>
-              </a:r>
-              <a:r>
-                <a:rPr lang="en-GB" sz="1000" kern="0" dirty="0">
-                  <a:solidFill>
-                    <a:srgbClr val="000000"/>
-                  </a:solidFill>
-                  <a:latin typeface="Arial" panose="020B0604020202020204" pitchFamily="34" charset="0"/>
-                  <a:cs typeface="Arial" panose="020B0604020202020204" pitchFamily="34" charset="0"/>
-                  <a:sym typeface="Arial" panose="020B0604020202020204"/>
-                </a:rPr>
-                <a:t>)</a:t>
-              </a:r>
-            </a:p>
-          </p:txBody>
-        </p:sp>
-      </p:grpSp>
-      <p:grpSp>
-        <p:nvGrpSpPr>
-          <p:cNvPr id="2" name="Group 1">
-            <a:extLst>
-              <a:ext uri="{FF2B5EF4-FFF2-40B4-BE49-F238E27FC236}">
-                <a16:creationId xmlns:a16="http://schemas.microsoft.com/office/drawing/2014/main" id="{29F2861B-7C90-0369-2EA4-ECAFA5684140}"/>
-              </a:ext>
-            </a:extLst>
-          </p:cNvPr>
-          <p:cNvGrpSpPr/>
+                </a:solidFill>
+                <a:latin typeface="Arial" panose="020B0604020202020204" pitchFamily="34" charset="0"/>
+                <a:cs typeface="Arial" panose="020B0604020202020204" pitchFamily="34" charset="0"/>
+                <a:sym typeface="Arial" panose="020B0604020202020204"/>
+              </a:rPr>
+              <a:t>Time (</a:t>
+            </a:r>
+            <a:r>
+              <a:rPr lang="en-GB" sz="1000" kern="0" dirty="0" err="1">
+                <a:solidFill>
+                  <a:srgbClr val="000000"/>
+                </a:solidFill>
+                <a:latin typeface="Arial" panose="020B0604020202020204" pitchFamily="34" charset="0"/>
+                <a:cs typeface="Arial" panose="020B0604020202020204" pitchFamily="34" charset="0"/>
+                <a:sym typeface="Arial" panose="020B0604020202020204"/>
+              </a:rPr>
+              <a:t>ms</a:t>
+            </a:r>
+            <a:r>
+              <a:rPr lang="en-GB" sz="1000" kern="0" dirty="0">
+                <a:solidFill>
+                  <a:srgbClr val="000000"/>
+                </a:solidFill>
+                <a:latin typeface="Arial" panose="020B0604020202020204" pitchFamily="34" charset="0"/>
+                <a:cs typeface="Arial" panose="020B0604020202020204" pitchFamily="34" charset="0"/>
+                <a:sym typeface="Arial" panose="020B0604020202020204"/>
+              </a:rPr>
+              <a:t>)</a:t>
+            </a:r>
+          </a:p>
+        </p:txBody>
+      </p:sp>
+      <p:pic>
+        <p:nvPicPr>
+          <p:cNvPr id="74" name="Google Shape;90;p13"/>
+          <p:cNvPicPr preferRelativeResize="0"/>
           <p:nvPr/>
-        </p:nvGrpSpPr>
-        <p:grpSpPr>
-          <a:xfrm>
+        </p:nvPicPr>
+        <p:blipFill rotWithShape="1">
+          <a:blip r:embed="rId6"/>
+          <a:srcRect l="39764" t="68333" r="31914" b="9902"/>
+          <a:stretch>
+            <a:fillRect/>
+          </a:stretch>
+        </p:blipFill>
+        <p:spPr>
+          <a:xfrm flipH="1">
             <a:off x="5468036" y="1936270"/>
-            <a:ext cx="1311150" cy="778448"/>
-            <a:chOff x="5468036" y="2206839"/>
-            <a:chExt cx="1311150" cy="778448"/>
-          </a:xfrm>
-        </p:grpSpPr>
-        <p:pic>
-          <p:nvPicPr>
-            <p:cNvPr id="74" name="Google Shape;90;p13"/>
-            <p:cNvPicPr preferRelativeResize="0"/>
-            <p:nvPr/>
-          </p:nvPicPr>
-          <p:blipFill rotWithShape="1">
-            <a:blip r:embed="rId6"/>
-            <a:srcRect l="39764" t="68333" r="31914" b="9902"/>
-            <a:stretch>
-              <a:fillRect/>
-            </a:stretch>
-          </p:blipFill>
-          <p:spPr>
-            <a:xfrm flipH="1">
-              <a:off x="5468036" y="2206839"/>
-              <a:ext cx="1311150" cy="597025"/>
-            </a:xfrm>
-            <a:prstGeom prst="rect">
-              <a:avLst/>
-            </a:prstGeom>
+            <a:ext cx="1311150" cy="597025"/>
+          </a:xfrm>
+          <a:prstGeom prst="rect">
+            <a:avLst/>
+          </a:prstGeom>
+          <a:noFill/>
+          <a:ln>
             <a:noFill/>
-            <a:ln>
-              <a:noFill/>
-            </a:ln>
-          </p:spPr>
-        </p:pic>
-        <p:sp>
-          <p:nvSpPr>
-            <p:cNvPr id="75" name="Google Shape;91;p13"/>
-            <p:cNvSpPr/>
-            <p:nvPr/>
-          </p:nvSpPr>
-          <p:spPr>
-            <a:xfrm>
-              <a:off x="5468036" y="2797787"/>
-              <a:ext cx="1311114" cy="187500"/>
-            </a:xfrm>
-            <a:prstGeom prst="rect">
-              <a:avLst/>
-            </a:prstGeom>
+          </a:ln>
+        </p:spPr>
+      </p:pic>
+      <p:sp>
+        <p:nvSpPr>
+          <p:cNvPr id="75" name="Google Shape;91;p13"/>
+          <p:cNvSpPr/>
+          <p:nvPr/>
+        </p:nvSpPr>
+        <p:spPr>
+          <a:xfrm>
+            <a:off x="5468036" y="2527218"/>
+            <a:ext cx="1311114" cy="187500"/>
+          </a:xfrm>
+          <a:prstGeom prst="rect">
+            <a:avLst/>
+          </a:prstGeom>
+          <a:noFill/>
+          <a:ln>
             <a:noFill/>
-            <a:ln>
-              <a:noFill/>
-            </a:ln>
-          </p:spPr>
-          <p:txBody>
-            <a:bodyPr spcFirstLastPara="1" wrap="square" lIns="91426" tIns="91426" rIns="91426" bIns="91426" anchor="ctr" anchorCtr="0">
-              <a:noAutofit/>
-            </a:bodyPr>
-            <a:lstStyle/>
-            <a:p>
-              <a:pPr algn="ctr" defTabSz="914400">
-                <a:buClr>
+          </a:ln>
+        </p:spPr>
+        <p:txBody>
+          <a:bodyPr spcFirstLastPara="1" wrap="square" lIns="91426" tIns="91426" rIns="91426" bIns="91426" anchor="ctr" anchorCtr="0">
+            <a:noAutofit/>
+          </a:bodyPr>
+          <a:lstStyle/>
+          <a:p>
+            <a:pPr algn="ctr" defTabSz="914400">
+              <a:buClr>
+                <a:srgbClr val="000000"/>
+              </a:buClr>
+              <a:buFont typeface="Arial" panose="020B0604020202020204"/>
+              <a:buNone/>
+            </a:pPr>
+            <a:r>
+              <a:rPr lang="en-GB" sz="1000" kern="0" dirty="0">
+                <a:solidFill>
                   <a:srgbClr val="000000"/>
-                </a:buClr>
-                <a:buFont typeface="Arial" panose="020B0604020202020204"/>
-                <a:buNone/>
-              </a:pPr>
-              <a:r>
-                <a:rPr lang="en-GB" sz="1000" kern="0" dirty="0">
-                  <a:solidFill>
-                    <a:srgbClr val="000000"/>
-                  </a:solidFill>
-                  <a:latin typeface="Arial" panose="020B0604020202020204" pitchFamily="34" charset="0"/>
-                  <a:cs typeface="Arial" panose="020B0604020202020204" pitchFamily="34" charset="0"/>
-                  <a:sym typeface="Arial" panose="020B0604020202020204"/>
-                </a:rPr>
-                <a:t>Frequency (ppm)</a:t>
-              </a:r>
-            </a:p>
-          </p:txBody>
-        </p:sp>
-      </p:grpSp>
+                </a:solidFill>
+                <a:latin typeface="Arial" panose="020B0604020202020204" pitchFamily="34" charset="0"/>
+                <a:cs typeface="Arial" panose="020B0604020202020204" pitchFamily="34" charset="0"/>
+                <a:sym typeface="Arial" panose="020B0604020202020204"/>
+              </a:rPr>
+              <a:t>Frequency (ppm)</a:t>
+            </a:r>
+          </a:p>
+        </p:txBody>
+      </p:sp>
     </p:spTree>
   </p:cSld>
   <p:clrMapOvr>
